--- a/deck/momentive-bi-digest.pptx
+++ b/deck/momentive-bi-digest.pptx
@@ -2505,7 +2505,7 @@
           <a:spcPct val="20000"/>
         </a:spcBef>
         <a:buFont typeface="Arial" pitchFamily="34" charset="0"/>
-        <a:buChar char="–"/>
+        <a:buChar char="-"/>
         <a:defRPr sz="2800" kern="1200">
           <a:solidFill>
             <a:schemeClr val="tx1"/>
@@ -2535,7 +2535,7 @@
           <a:spcPct val="20000"/>
         </a:spcBef>
         <a:buFont typeface="Arial" pitchFamily="34" charset="0"/>
-        <a:buChar char="–"/>
+        <a:buChar char="-"/>
         <a:defRPr sz="2000" kern="1200">
           <a:solidFill>
             <a:schemeClr val="tx1"/>

--- a/deck/momentive-bi-digest.pptx
+++ b/deck/momentive-bi-digest.pptx
@@ -1227,7 +1227,7 @@
           <a:p>
             <a:r>
               <a:rPr lang="en-US" dirty="0"/>
-              <a:t>I include this because the seat is an AI operations job and how the thing was built is at least as interesting as what it does. The orchestrator never reading source files is the load bearing part. An orchestrator that reads what its workers wrote becomes the context bottleneck the fanout existed to avoid, and then it starts second guessing decisions the worker already made better. It reads a structured envelope with an assumptions array, and when two envelopes disagree that is a visible conflict rather than a silent one.</a:t>
+              <a:t>I include this because the seat is an AI operations job and how the thing was built is at least as interesting as what it does. The orchestrator working from envelopes rather than from source files is the load bearing part. An orchestrator that reads what its workers wrote becomes the context bottleneck the fanout existed to avoid, and then it starts second guessing decisions the worker already made better. It reads a structured envelope with an assumptions array, and when two envelopes disagree that is a visible conflict rather than a silent one.</a:t>
             </a:r>
             <a:endParaRPr lang="en-US" dirty="0"/>
           </a:p>
@@ -4362,7 +4362,7 @@
                 <a:ea typeface="Calibri" pitchFamily="34" charset="-122"/>
                 <a:cs typeface="Calibri" pitchFamily="34" charset="-120"/>
               </a:rPr>
-              <a:t>1118 events across the store, 561 of them reads and 218 writes, one validated line each.</a:t>
+              <a:t>1136 events across the store, 575 of them reads and 218 writes, one validated line each.</a:t>
             </a:r>
             <a:endParaRPr lang="en-US" sz="1150" dirty="0"/>
           </a:p>
@@ -5016,7 +5016,7 @@
         <p:spPr>
           <a:xfrm>
             <a:off x="7516368" y="2695587"/>
-            <a:ext cx="4108399" cy="219456"/>
+            <a:ext cx="4108399" cy="457200"/>
           </a:xfrm>
           <a:prstGeom prst="rect">
             <a:avLst/>
@@ -5040,7 +5040,7 @@
                 <a:ea typeface="Courier New" pitchFamily="34" charset="-122"/>
                 <a:cs typeface="Courier New" pitchFamily="34" charset="-120"/>
               </a:rPr>
-              <a:t>$ grep -n def src/digest/agents/editor/tools.py</a:t>
+              <a:t>$ grep -n -e ^TOOL_NAMES -e "^    def " -e "no write tool" src/digest/agents/editor/tools.py</a:t>
             </a:r>
             <a:endParaRPr lang="en-US" sz="900" dirty="0"/>
           </a:p>
@@ -5062,7 +5062,7 @@
         </p:blipFill>
         <p:spPr>
           <a:xfrm>
-            <a:off x="7516368" y="2926080"/>
+            <a:off x="7516368" y="3200400"/>
             <a:ext cx="4108399" cy="1647639"/>
           </a:xfrm>
           <a:prstGeom prst="rect">
@@ -5078,8 +5078,8 @@
         </p:nvSpPr>
         <p:spPr>
           <a:xfrm>
-            <a:off x="7516368" y="4628583"/>
-            <a:ext cx="4108399" cy="219456"/>
+            <a:off x="7516368" y="4901184"/>
+            <a:ext cx="4108399" cy="457200"/>
           </a:xfrm>
           <a:prstGeom prst="rect">
             <a:avLst/>
@@ -5103,7 +5103,7 @@
                 <a:ea typeface="Courier New" pitchFamily="34" charset="-122"/>
                 <a:cs typeface="Courier New" pitchFamily="34" charset="-120"/>
               </a:rPr>
-              <a:t>$ python -m digest approve --theme THEME-0002 --dry-run</a:t>
+              <a:t>$ python -m digest approve --theme THEME-0002 --mode replay --repo jimit1/bi-theme-digest-agent --dry-run</a:t>
             </a:r>
             <a:endParaRPr lang="en-US" sz="900" dirty="0"/>
           </a:p>
@@ -8074,7 +8074,7 @@
                 <a:ea typeface="Calibri" pitchFamily="34" charset="-122"/>
                 <a:cs typeface="Calibri" pitchFamily="34" charset="-120"/>
               </a:rPr>
-              <a:t>$4.687941 by the published rate table against $5.755600 by the provider's own accounting, a ratio of 1.2277, because the provider bills a one hour cache write higher than the table does. Both numbers are labelled everywhere they appear.</a:t>
+              <a:t>$5.067601 by the published rate table against $5.755600 by the provider's own accounting, a ratio of 1.1358, because the provider bills a one hour cache write higher than the table does. The provider's figure predates the third analyst question and is carried forward as a declared constant rather than reinvented. Both numbers are labelled everywhere they appear.</a:t>
             </a:r>
             <a:endParaRPr lang="en-US" sz="1200" dirty="0"/>
           </a:p>
@@ -8754,7 +8754,7 @@
                 <a:ea typeface="Calibri" pitchFamily="34" charset="-122"/>
                 <a:cs typeface="Calibri" pitchFamily="34" charset="-120"/>
               </a:rPr>
-              <a:t>One command reruns a week against a different tier map and prints cost, eval pass rate and theme assignment overlap against the reference: $0.28314, 23.23 percent of reference, 16 of 16 assertions on both sides.</a:t>
+              <a:t>One command reruns a week against a different tier map and prints cost, eval pass rate and theme assignment overlap against the reference: $0.28314, 23.23 percent of reference, and the comparison scores the 16 assertions that bind to week 37 alone, out of the 18 in the golden set, which pass on both sides.</a:t>
             </a:r>
             <a:endParaRPr lang="en-US" sz="1200" dirty="0"/>
           </a:p>
@@ -9473,7 +9473,7 @@
                 <a:ea typeface="Cambria" pitchFamily="34" charset="-122"/>
                 <a:cs typeface="Cambria" pitchFamily="34" charset="-120"/>
               </a:rPr>
-              <a:t>6</a:t>
+              <a:t>7</a:t>
             </a:r>
             <a:endParaRPr lang="en-US" sz="3000" dirty="0"/>
           </a:p>
@@ -9515,7 +9515,7 @@
                 <a:ea typeface="Calibri" pitchFamily="34" charset="-122"/>
                 <a:cs typeface="Calibri" pitchFamily="34" charset="-120"/>
               </a:rPr>
-              <a:t>waves, each one gated on the wave before it</a:t>
+              <a:t>waves, numbered 0 to 6, each gated on the wave before it</a:t>
             </a:r>
             <a:endParaRPr lang="en-US" sz="1050" dirty="0"/>
           </a:p>
@@ -9716,7 +9716,7 @@
                 <a:ea typeface="Cambria" pitchFamily="34" charset="-122"/>
                 <a:cs typeface="Cambria" pitchFamily="34" charset="-120"/>
               </a:rPr>
-              <a:t>0</a:t>
+              <a:t>1</a:t>
             </a:r>
             <a:endParaRPr lang="en-US" sz="3000" dirty="0"/>
           </a:p>
@@ -9758,7 +9758,7 @@
                 <a:ea typeface="Calibri" pitchFamily="34" charset="-122"/>
                 <a:cs typeface="Calibri" pitchFamily="34" charset="-120"/>
               </a:rPr>
-              <a:t>source files the orchestrator read, by design</a:t>
+              <a:t>orchestrator, holding the plan and dispatching every brief</a:t>
             </a:r>
             <a:endParaRPr lang="en-US" sz="1050" dirty="0"/>
           </a:p>
@@ -9827,7 +9827,7 @@
                 <a:ea typeface="Calibri" pitchFamily="34" charset="-122"/>
                 <a:cs typeface="Calibri" pitchFamily="34" charset="-120"/>
               </a:rPr>
-              <a:t>The orchestrator holds the plan and reads envelopes. It does not read source files.</a:t>
+              <a:t>The orchestrator dispatched briefs and read envelopes, and opened product files only to triage QA findings.</a:t>
             </a:r>
             <a:endParaRPr lang="en-US" sz="1500" dirty="0"/>
           </a:p>
@@ -9938,7 +9938,7 @@
                 <a:ea typeface="Calibri" pitchFamily="34" charset="-122"/>
                 <a:cs typeface="Calibri" pitchFamily="34" charset="-120"/>
               </a:rPr>
-              <a:t>Contracts first, then the corpus and the connectors, then the pipeline and the agents, then integration and the live runs, then a wave of adversarial review that built nothing, then the write up and this deck. A worker only starts when the wave it depends on has returned.</a:t>
+              <a:t>Wave 0 is the contracts, then the corpus and the connectors, then the pipeline and the agents, then integration and the live runs, then the write up, then a wave of adversarial review that built nothing, then this deck. A worker only starts when the wave it depends on has returned.</a:t>
             </a:r>
             <a:endParaRPr lang="en-US" sz="1200" dirty="0"/>
           </a:p>
@@ -10049,7 +10049,7 @@
                 <a:ea typeface="Calibri" pitchFamily="34" charset="-122"/>
                 <a:cs typeface="Calibri" pitchFamily="34" charset="-120"/>
               </a:rPr>
-              <a:t>The orchestrator on one model, the writer and reviewer tier on the frontier model, the cheap tier on a mid model. The plan named a different cheap tier and the harness offered a different one, so the committed roster file records what actually ran. The product's own numbers are the proof the shape worked: 55 claims, 0 rejected, 18 of 18 assertions, 527 tests, byte identical replay.</a:t>
+              <a:t>The orchestrator on one model, the writer and reviewer tier on the frontier model, the cheap tier on a mid model. The plan named a different cheap tier and the harness offered a different one, so the committed roster file records what actually ran. The product's own numbers are the proof the shape worked: 55 claims, 0 rejected, 18 of 18 assertions, 531 tests, byte identical replay.</a:t>
             </a:r>
             <a:endParaRPr lang="en-US" sz="1200" dirty="0"/>
           </a:p>
@@ -16168,7 +16168,7 @@
                 <a:ea typeface="Calibri" pitchFamily="34" charset="-122"/>
                 <a:cs typeface="Calibri" pitchFamily="34" charset="-120"/>
               </a:rPr>
-              <a:t>Nine stages. Code runs eight of them and one model agent runs the ninth, which is the division of labour the whole design rests on.</a:t>
+              <a:t>Nine stages. Three model agents run the two that need judgment, two readers at the extraction tier and the editor at the synthesis tier. Code runs six, and a person runs the ninth, which is the division of labour the whole design rests on.</a:t>
             </a:r>
             <a:endParaRPr lang="en-US" sz="1350" dirty="0"/>
           </a:p>
@@ -16263,6 +16263,10 @@
             <a:prstDash val="solid"/>
           </a:ln>
         </p:spPr>
+        <p:txBody>
+          <a:bodyPr/>
+          <a:p/>
+        </p:txBody>
       </p:sp>
       <p:sp>
         <p:nvSpPr>
@@ -19068,7 +19072,7 @@
                 <a:ea typeface="Calibri" pitchFamily="34" charset="-122"/>
                 <a:cs typeface="Calibri" pitchFamily="34" charset="-120"/>
               </a:rPr>
-              <a:t>Always read, under five kilobytes, says what is here and in what order to read it.</a:t>
+              <a:t>Always read, 4351 bytes today, says what is here and in what order to read it.</a:t>
             </a:r>
             <a:endParaRPr lang="en-US" sz="1200" dirty="0"/>
           </a:p>
@@ -21408,7 +21412,7 @@
                 <a:ea typeface="Calibri" pitchFamily="34" charset="-122"/>
                 <a:cs typeface="Calibri" pitchFamily="34" charset="-120"/>
               </a:rPr>
-              <a:t>A Salesforce comment saying the account is a churn risk. It was never in the result set, because IsPublished equals true is in the SOQL itself rather than in a filter afterwards. 10 private comments were withheld across the sample run, and the count is in the audit log.</a:t>
+              <a:t>A Salesforce comment saying the account is a churn risk. It was never in the result set, because IsPublished equals true is in the SOQL itself rather than in a filter afterwards. 10 private comments withheld across the three weeks, 4 of them in week 37, and the count is in the audit log.</a:t>
             </a:r>
             <a:endParaRPr lang="en-US" sz="1150" dirty="0"/>
           </a:p>
